--- a/docs/Презентация_ВКР_Предзащита.pptx
+++ b/docs/Презентация_ВКР_Предзащита.pptx
@@ -18,9 +18,10 @@
     <p:sldId id="266" r:id="rId12"/>
     <p:sldId id="267" r:id="rId13"/>
     <p:sldId id="268" r:id="rId14"/>
+    <p:sldId id="269" r:id="rId15"/>
   </p:sldIdLst>
   <p:notesMasterIdLst>
-    <p:notesMasterId r:id="rId15"/>
+    <p:notesMasterId r:id="rId16"/>
   </p:notesMasterIdLst>
   <p:sldSz cx="9144000" cy="5143500"/>
   <p:notesSz cx="5143500" cy="9144000"/>
@@ -1116,8 +1117,8 @@
           <a:p>
             <a:r>
               <a:rPr lang="en-US" dirty="0"/>
-              <a:t>Целью работы является повышение эффективности публикации и сопровождения веб-игр на платформе Welwise Games за счёт системы, которая переводит разработчиков на самообслуживание и убирает ручные операции сотрудников.
-Для этого поставлено шесть задач. На текущий момент выполнены анализ, модели процессов и техническое задание по ГОСТ 34.602-2020; проектирование и реализация подсистем ведутся параллельно.
+              <a:t>Целью работы является повышение эффективности публикации и сопровождения веб-игр на платформе Welwise Games за счёт внедрения автоматизированной системы, которая переводит разработчиков на самообслуживание и убирает ручные операции сотрудников.
+Для этого поставлено шесть задач — от анализа предметной области до тестирования системы.
 Переход: Функции системы определены диаграммами вариантов использования.</a:t>
             </a:r>
             <a:endParaRPr lang="en-US" dirty="0"/>
@@ -1386,8 +1387,7 @@
             <a:r>
               <a:rPr lang="en-US" dirty="0"/>
               <a:t>Разработчик подключает собственные узлы и ведёт сервисы данных с резервным копированием, администратор включает узлы в пул платформы и управляет учётными записями, а персонал может экстренно снять игру с публикации.
-Таким образом, на текущем этапе проанализирована предметная область, построены модели процессов, разработано техническое задание и определены функции системы; проектирование и реализация продолжаются.
-Позвольте на этом завершить доклад. Благодарю за внимание, готов ответить на ваши вопросы.</a:t>
+Переход: Подведу итоги проделанной работы.</a:t>
             </a:r>
             <a:endParaRPr lang="en-US" dirty="0"/>
           </a:p>
@@ -1411,6 +1411,97 @@
             <a:fld id="{F7021451-1387-4CA6-816F-3879F97B5CBC}" type="slidenum">
               <a:rPr lang="en-US"/>
               <a:t>13</a:t>
+            </a:fld>
+            <a:endParaRPr lang="en-US"/>
+          </a:p>
+        </p:txBody>
+      </p:sp>
+    </p:spTree>
+    <p:extLst>
+      <p:ext uri="{BB962C8B-B14F-4D97-AF65-F5344CB8AC3E}">
+        <p14:creationId xmlns:p14="http://schemas.microsoft.com/office/powerpoint/2010/main" val="1024086991"/>
+      </p:ext>
+    </p:extLst>
+  </p:cSld>
+  <p:clrMapOvr>
+    <a:masterClrMapping/>
+  </p:clrMapOvr>
+</p:notes>
+</file>
+
+<file path=ppt/notesSlides/notesSlide14.xml><?xml version="1.0" encoding="utf-8"?>
+<p:notes xmlns:a="http://schemas.openxmlformats.org/drawingml/2006/main" xmlns:r="http://schemas.openxmlformats.org/officeDocument/2006/relationships" xmlns:p="http://schemas.openxmlformats.org/presentationml/2006/main">
+  <p:cSld>
+    <p:spTree>
+      <p:nvGrpSpPr>
+        <p:cNvPr id="1" name=""/>
+        <p:cNvGrpSpPr/>
+        <p:nvPr/>
+      </p:nvGrpSpPr>
+      <p:grpSpPr>
+        <a:xfrm>
+          <a:off x="0" y="0"/>
+          <a:ext cx="0" cy="0"/>
+          <a:chOff x="0" y="0"/>
+          <a:chExt cx="0" cy="0"/>
+        </a:xfrm>
+      </p:grpSpPr>
+      <p:sp>
+        <p:nvSpPr>
+          <p:cNvPr id="2" name="Slide Image Placeholder 1"/>
+          <p:cNvSpPr>
+            <a:spLocks noGrp="1" noRot="1" noChangeAspect="1"/>
+          </p:cNvSpPr>
+          <p:nvPr>
+            <p:ph type="sldImg"/>
+          </p:nvPr>
+        </p:nvSpPr>
+        <p:spPr/>
+      </p:sp>
+      <p:sp>
+        <p:nvSpPr>
+          <p:cNvPr id="3" name="Notes Placeholder 2"/>
+          <p:cNvSpPr>
+            <a:spLocks noGrp="1"/>
+          </p:cNvSpPr>
+          <p:nvPr>
+            <p:ph type="body" idx="1"/>
+          </p:nvPr>
+        </p:nvSpPr>
+        <p:spPr/>
+        <p:txBody>
+          <a:bodyPr/>
+          <a:lstStyle/>
+          <a:p>
+            <a:r>
+              <a:rPr lang="en-US" dirty="0"/>
+              <a:t>В ходе работы проанализирована предметная область и деятельность заказчика, построены модели процессов «как есть» и выявлены их проблемы, а на их основе — модели «как будет». Сравнение с аналогами подтвердило, что готового решения нет, поэтому сформулированы цель и задачи и разработано техническое задание по ГОСТ 34.602-2020.
+Дальше работа перешла от моделей к коду: функции системы определены диаграммами вариантов использования, система спроектирована и реализована в виде восьми сервисов, а программный код проверен 413 автоматическими тестами.
+Сейчас проект находится на этапе внедрения: система проходит тестирование на реальном стенде платформы Welwise Games, и в течение ближайшего месяца этот этап будет завершён.
+Позвольте на этом завершить доклад. Благодарю за внимание, готов ответить на ваши вопросы.</a:t>
+            </a:r>
+            <a:endParaRPr lang="en-US" dirty="0"/>
+          </a:p>
+        </p:txBody>
+      </p:sp>
+      <p:sp>
+        <p:nvSpPr>
+          <p:cNvPr id="4" name="Slide Number Placeholder 3"/>
+          <p:cNvSpPr>
+            <a:spLocks noGrp="1"/>
+          </p:cNvSpPr>
+          <p:nvPr>
+            <p:ph type="sldNum" sz="quarter" idx="10"/>
+          </p:nvPr>
+        </p:nvSpPr>
+        <p:spPr/>
+        <p:txBody>
+          <a:bodyPr/>
+          <a:lstStyle/>
+          <a:p>
+            <a:fld id="{F7021451-1387-4CA6-816F-3879F97B5CBC}" type="slidenum">
+              <a:rPr lang="en-US"/>
+              <a:t>14</a:t>
             </a:fld>
             <a:endParaRPr lang="en-US"/>
           </a:p>
@@ -3104,7 +3195,7 @@
                 <a:ea typeface="Times New Roman" pitchFamily="34" charset="-122"/>
                 <a:cs typeface="Times New Roman" pitchFamily="34" charset="-120"/>
               </a:rPr>
-              <a:t> — повышение эффективности процесса публикации и сопровождения веб‑игр на платформе Welwise Games за счёт разработки автоматизированной системы, переводящей разработчиков на самообслуживание и исключающей ручные операции сотрудников.</a:t>
+              <a:t> — повышение эффективности процесса публикации и сопровождения веб‑игр на платформе Welwise Games за счёт внедрения автоматизированной системы, переводящей разработчиков на самообслуживание и исключающей ручные операции сотрудников.</a:t>
             </a:r>
             <a:endParaRPr lang="en-US" sz="1600" dirty="0"/>
           </a:p>
@@ -4075,6 +4166,404 @@
             <a:fld id="{F7021451-1387-4CA6-816F-3879F97B5CBC}" type="slidenum">
               <a:rPr b="0" lang="en-US"/>
               <a:t>13</a:t>
+            </a:fld>
+            <a:endParaRPr lang="en-US"/>
+          </a:p>
+        </p:txBody>
+      </p:sp>
+    </p:spTree>
+  </p:cSld>
+  <p:clrMapOvr>
+    <a:masterClrMapping/>
+  </p:clrMapOvr>
+  <mc:AlternateContent xmlns:mc="http://schemas.openxmlformats.org/markup-compatibility/2006">
+    <mc:Choice xmlns:p159="http://schemas.microsoft.com/office/powerpoint/2015/09/main" Requires="p159">
+      <p:transition xmlns:p14="http://schemas.microsoft.com/office/powerpoint/2010/main" spd="slow" p14:dur="900">
+        <p159:morph option="byObject"/>
+      </p:transition>
+    </mc:Choice>
+    <mc:Fallback>
+      <p:transition spd="slow">
+        <p:fade/>
+      </p:transition>
+    </mc:Fallback>
+  </mc:AlternateContent>
+</p:sld>
+</file>
+
+<file path=ppt/slides/slide14.xml><?xml version="1.0" encoding="utf-8"?>
+<p:sld xmlns:a="http://schemas.openxmlformats.org/drawingml/2006/main" xmlns:r="http://schemas.openxmlformats.org/officeDocument/2006/relationships" xmlns:p="http://schemas.openxmlformats.org/presentationml/2006/main">
+  <p:cSld name="Slide 14">
+    <p:spTree>
+      <p:nvGrpSpPr>
+        <p:cNvPr id="1" name=""/>
+        <p:cNvGrpSpPr/>
+        <p:nvPr/>
+      </p:nvGrpSpPr>
+      <p:grpSpPr>
+        <a:xfrm>
+          <a:off x="0" y="0"/>
+          <a:ext cx="0" cy="0"/>
+          <a:chOff x="0" y="0"/>
+          <a:chExt cx="0" cy="0"/>
+        </a:xfrm>
+      </p:grpSpPr>
+      <p:sp>
+        <p:nvSpPr>
+          <p:cNvPr id="2" name="Text 0"/>
+          <p:cNvSpPr txBox="1"/>
+          <p:nvPr/>
+        </p:nvSpPr>
+        <p:spPr>
+          <a:xfrm>
+            <a:off x="274320" y="137160"/>
+            <a:ext cx="8595360" cy="548640"/>
+          </a:xfrm>
+          <a:prstGeom prst="rect">
+            <a:avLst/>
+          </a:prstGeom>
+          <a:noFill/>
+          <a:ln/>
+        </p:spPr>
+        <p:txBody>
+          <a:bodyPr wrap="square" lIns="0" tIns="0" rIns="0" bIns="0" rtlCol="0" anchor="ctr"/>
+          <a:lstStyle/>
+          <a:p>
+            <a:pPr algn="ctr" indent="0" marL="0">
+              <a:buNone/>
+            </a:pPr>
+            <a:r>
+              <a:rPr lang="en-US" sz="2800" b="1" dirty="0">
+                <a:solidFill>
+                  <a:srgbClr val="000000"/>
+                </a:solidFill>
+                <a:latin typeface="Times New Roman" pitchFamily="34" charset="0"/>
+                <a:ea typeface="Times New Roman" pitchFamily="34" charset="-122"/>
+                <a:cs typeface="Times New Roman" pitchFamily="34" charset="-120"/>
+              </a:rPr>
+              <a:t>ЗАКЛЮЧЕНИЕ</a:t>
+            </a:r>
+            <a:endParaRPr lang="en-US" sz="2800" dirty="0"/>
+          </a:p>
+        </p:txBody>
+      </p:sp>
+      <p:sp>
+        <p:nvSpPr>
+          <p:cNvPr id="3" name="Text 1"/>
+          <p:cNvSpPr txBox="1"/>
+          <p:nvPr/>
+        </p:nvSpPr>
+        <p:spPr>
+          <a:xfrm>
+            <a:off x="457200" y="868680"/>
+            <a:ext cx="8229600" cy="3246120"/>
+          </a:xfrm>
+          <a:prstGeom prst="rect">
+            <a:avLst/>
+          </a:prstGeom>
+          <a:noFill/>
+          <a:ln/>
+        </p:spPr>
+        <p:txBody>
+          <a:bodyPr wrap="square" lIns="0" tIns="0" rIns="0" bIns="0" rtlCol="0" anchor="t"/>
+          <a:lstStyle/>
+          <a:p>
+            <a:pPr algn="just" indent="0" marL="0">
+              <a:spcAft>
+                <a:spcPts val="200"/>
+              </a:spcAft>
+              <a:buNone/>
+            </a:pPr>
+            <a:r>
+              <a:rPr lang="en-US" sz="1500" b="1" dirty="0">
+                <a:solidFill>
+                  <a:srgbClr val="000000"/>
+                </a:solidFill>
+                <a:latin typeface="Times New Roman" pitchFamily="34" charset="0"/>
+                <a:ea typeface="Times New Roman" pitchFamily="34" charset="-122"/>
+                <a:cs typeface="Times New Roman" pitchFamily="34" charset="-120"/>
+              </a:rPr>
+              <a:t>В ходе работы:</a:t>
+            </a:r>
+            <a:endParaRPr lang="en-US" sz="1500" dirty="0"/>
+          </a:p>
+          <a:p>
+            <a:pPr algn="just" marL="342900" indent="-342900">
+              <a:spcAft>
+                <a:spcPts val="200"/>
+              </a:spcAft>
+              <a:buSzPct val="100000"/>
+              <a:buFont typeface="+mj-lt"/>
+              <a:buAutoNum type="arabicParenR" startAt="1"/>
+            </a:pPr>
+            <a:r>
+              <a:rPr lang="en-US" sz="1500" dirty="0">
+                <a:solidFill>
+                  <a:srgbClr val="000000"/>
+                </a:solidFill>
+                <a:latin typeface="Times New Roman" pitchFamily="34" charset="0"/>
+                <a:ea typeface="Times New Roman" pitchFamily="34" charset="-122"/>
+                <a:cs typeface="Times New Roman" pitchFamily="34" charset="-120"/>
+              </a:rPr>
+              <a:t>Проанализирована предметная область и деятельность заказчика — игровой платформы Welwise Games.</a:t>
+            </a:r>
+            <a:endParaRPr lang="en-US" sz="1500" dirty="0"/>
+          </a:p>
+          <a:p>
+            <a:pPr algn="just" marL="342900" indent="-342900">
+              <a:spcAft>
+                <a:spcPts val="200"/>
+              </a:spcAft>
+              <a:buSzPct val="100000"/>
+              <a:buFont typeface="+mj-lt"/>
+              <a:buAutoNum type="arabicParenR" startAt="1"/>
+            </a:pPr>
+            <a:r>
+              <a:rPr lang="en-US" sz="1500" dirty="0">
+                <a:solidFill>
+                  <a:srgbClr val="000000"/>
+                </a:solidFill>
+                <a:latin typeface="Times New Roman" pitchFamily="34" charset="0"/>
+                <a:ea typeface="Times New Roman" pitchFamily="34" charset="-122"/>
+                <a:cs typeface="Times New Roman" pitchFamily="34" charset="-120"/>
+              </a:rPr>
+              <a:t>Построены модели процессов «как есть» для публикации игр и управления серверами, выявлены проблемы.</a:t>
+            </a:r>
+            <a:endParaRPr lang="en-US" sz="1500" dirty="0"/>
+          </a:p>
+          <a:p>
+            <a:pPr algn="just" marL="342900" indent="-342900">
+              <a:spcAft>
+                <a:spcPts val="200"/>
+              </a:spcAft>
+              <a:buSzPct val="100000"/>
+              <a:buFont typeface="+mj-lt"/>
+              <a:buAutoNum type="arabicParenR" startAt="1"/>
+            </a:pPr>
+            <a:r>
+              <a:rPr lang="en-US" sz="1500" dirty="0">
+                <a:solidFill>
+                  <a:srgbClr val="000000"/>
+                </a:solidFill>
+                <a:latin typeface="Times New Roman" pitchFamily="34" charset="0"/>
+                <a:ea typeface="Times New Roman" pitchFamily="34" charset="-122"/>
+                <a:cs typeface="Times New Roman" pitchFamily="34" charset="-120"/>
+              </a:rPr>
+              <a:t>Разработаны модели процессов «как будет» с использованием автоматизированной системы.</a:t>
+            </a:r>
+            <a:endParaRPr lang="en-US" sz="1500" dirty="0"/>
+          </a:p>
+          <a:p>
+            <a:pPr algn="just" marL="342900" indent="-342900">
+              <a:spcAft>
+                <a:spcPts val="200"/>
+              </a:spcAft>
+              <a:buSzPct val="100000"/>
+              <a:buFont typeface="+mj-lt"/>
+              <a:buAutoNum type="arabicParenR" startAt="1"/>
+            </a:pPr>
+            <a:r>
+              <a:rPr lang="en-US" sz="1500" dirty="0">
+                <a:solidFill>
+                  <a:srgbClr val="000000"/>
+                </a:solidFill>
+                <a:latin typeface="Times New Roman" pitchFamily="34" charset="0"/>
+                <a:ea typeface="Times New Roman" pitchFamily="34" charset="-122"/>
+                <a:cs typeface="Times New Roman" pitchFamily="34" charset="-120"/>
+              </a:rPr>
+              <a:t>Проведено сравнение с аналогами: GameDistribution, CrazyGames, Poki for Developers, itch.io, CloudArcade.</a:t>
+            </a:r>
+            <a:endParaRPr lang="en-US" sz="1500" dirty="0"/>
+          </a:p>
+          <a:p>
+            <a:pPr algn="just" marL="342900" indent="-342900">
+              <a:spcAft>
+                <a:spcPts val="200"/>
+              </a:spcAft>
+              <a:buSzPct val="100000"/>
+              <a:buFont typeface="+mj-lt"/>
+              <a:buAutoNum type="arabicParenR" startAt="1"/>
+            </a:pPr>
+            <a:r>
+              <a:rPr lang="en-US" sz="1500" dirty="0">
+                <a:solidFill>
+                  <a:srgbClr val="000000"/>
+                </a:solidFill>
+                <a:latin typeface="Times New Roman" pitchFamily="34" charset="0"/>
+                <a:ea typeface="Times New Roman" pitchFamily="34" charset="-122"/>
+                <a:cs typeface="Times New Roman" pitchFamily="34" charset="-120"/>
+              </a:rPr>
+              <a:t>Сформулированы цель и задачи, разработано техническое задание по ГОСТ 34.602-2020.</a:t>
+            </a:r>
+            <a:endParaRPr lang="en-US" sz="1500" dirty="0"/>
+          </a:p>
+          <a:p>
+            <a:pPr algn="just" marL="342900" indent="-342900">
+              <a:spcAft>
+                <a:spcPts val="200"/>
+              </a:spcAft>
+              <a:buSzPct val="100000"/>
+              <a:buFont typeface="+mj-lt"/>
+              <a:buAutoNum type="arabicParenR" startAt="1"/>
+            </a:pPr>
+            <a:r>
+              <a:rPr lang="en-US" sz="1500" dirty="0">
+                <a:solidFill>
+                  <a:srgbClr val="000000"/>
+                </a:solidFill>
+                <a:latin typeface="Times New Roman" pitchFamily="34" charset="0"/>
+                <a:ea typeface="Times New Roman" pitchFamily="34" charset="-122"/>
+                <a:cs typeface="Times New Roman" pitchFamily="34" charset="-120"/>
+              </a:rPr>
+              <a:t>Построены диаграммы вариантов использования для четырёх ролей: разработчик, модератор, администратор, клиент игры.</a:t>
+            </a:r>
+            <a:endParaRPr lang="en-US" sz="1500" dirty="0"/>
+          </a:p>
+          <a:p>
+            <a:pPr algn="just" marL="342900" indent="-342900">
+              <a:spcAft>
+                <a:spcPts val="200"/>
+              </a:spcAft>
+              <a:buSzPct val="100000"/>
+              <a:buFont typeface="+mj-lt"/>
+              <a:buAutoNum type="arabicParenR" startAt="1"/>
+            </a:pPr>
+            <a:r>
+              <a:rPr lang="en-US" sz="1500" dirty="0">
+                <a:solidFill>
+                  <a:srgbClr val="000000"/>
+                </a:solidFill>
+                <a:latin typeface="Times New Roman" pitchFamily="34" charset="0"/>
+                <a:ea typeface="Times New Roman" pitchFamily="34" charset="-122"/>
+                <a:cs typeface="Times New Roman" pitchFamily="34" charset="-120"/>
+              </a:rPr>
+              <a:t>Спроектирована и реализована система из восьми сервисов, программный код покрыт 413 автоматическими тестами.</a:t>
+            </a:r>
+            <a:endParaRPr lang="en-US" sz="1500" dirty="0"/>
+          </a:p>
+        </p:txBody>
+      </p:sp>
+      <p:sp>
+        <p:nvSpPr>
+          <p:cNvPr id="4" name="Shape 2"/>
+          <p:cNvSpPr/>
+          <p:nvPr/>
+        </p:nvSpPr>
+        <p:spPr>
+          <a:xfrm>
+            <a:off x="457200" y="4206240"/>
+            <a:ext cx="8229600" cy="566928"/>
+          </a:xfrm>
+          <a:prstGeom prst="rect">
+            <a:avLst/>
+          </a:prstGeom>
+          <a:solidFill>
+            <a:srgbClr val="FFFFFF"/>
+          </a:solidFill>
+          <a:ln w="19050">
+            <a:solidFill>
+              <a:srgbClr val="2B5C8F"/>
+            </a:solidFill>
+            <a:prstDash val="solid"/>
+          </a:ln>
+        </p:spPr>
+      </p:sp>
+      <p:sp>
+        <p:nvSpPr>
+          <p:cNvPr id="5" name="Text 3"/>
+          <p:cNvSpPr txBox="1"/>
+          <p:nvPr/>
+        </p:nvSpPr>
+        <p:spPr>
+          <a:xfrm>
+            <a:off x="594360" y="4206240"/>
+            <a:ext cx="7955280" cy="566928"/>
+          </a:xfrm>
+          <a:prstGeom prst="rect">
+            <a:avLst/>
+          </a:prstGeom>
+          <a:noFill/>
+          <a:ln/>
+        </p:spPr>
+        <p:txBody>
+          <a:bodyPr wrap="square" lIns="0" tIns="0" rIns="0" bIns="0" rtlCol="0" anchor="ctr"/>
+          <a:lstStyle/>
+          <a:p>
+            <a:pPr indent="0" marL="0">
+              <a:buNone/>
+            </a:pPr>
+            <a:r>
+              <a:rPr lang="en-US" sz="1500" b="1" dirty="0">
+                <a:solidFill>
+                  <a:srgbClr val="2B5C8F"/>
+                </a:solidFill>
+                <a:latin typeface="Times New Roman" pitchFamily="34" charset="0"/>
+                <a:ea typeface="Times New Roman" pitchFamily="34" charset="-122"/>
+                <a:cs typeface="Times New Roman" pitchFamily="34" charset="-120"/>
+              </a:rPr>
+              <a:t>Текущий этап — внедрение: </a:t>
+            </a:r>
+            <a:pPr indent="0" marL="0">
+              <a:buNone/>
+            </a:pPr>
+            <a:r>
+              <a:rPr lang="en-US" sz="1500" dirty="0">
+                <a:solidFill>
+                  <a:srgbClr val="000000"/>
+                </a:solidFill>
+                <a:latin typeface="Times New Roman" pitchFamily="34" charset="0"/>
+                <a:ea typeface="Times New Roman" pitchFamily="34" charset="-122"/>
+                <a:cs typeface="Times New Roman" pitchFamily="34" charset="-120"/>
+              </a:rPr>
+              <a:t>система проходит тестирование на реальном стенде платформы, завершение — в течение месяца.</a:t>
+            </a:r>
+            <a:endParaRPr lang="en-US" sz="1500" dirty="0"/>
+          </a:p>
+        </p:txBody>
+      </p:sp>
+      <p:sp>
+        <p:nvSpPr>
+          <p:cNvPr id="25" name="Slide Number Placeholder 0"/>
+          <p:cNvSpPr>
+            <a:spLocks noGrp="1"/>
+          </p:cNvSpPr>
+          <p:nvPr>
+            <p:ph type="sldNum" sz="quarter" idx="4294967295"/>
+          </p:nvPr>
+        </p:nvSpPr>
+        <p:spPr>
+          <a:xfrm>
+            <a:off x="8503920" y="4800600"/>
+            <a:ext cx="411480" cy="274320"/>
+          </a:xfrm>
+          <a:prstGeom prst="rect">
+            <a:avLst/>
+          </a:prstGeom>
+          <a:extLst>
+            <a:ext uri="{C572A759-6A51-4108-AA02-DFA0A04FC94B}">
+              <ma14:wrappingTextBoxFlag xmlns:ma14="http://schemas.microsoft.com/office/mac/drawingml/2011/main" val="0"/>
+            </a:ext>
+          </a:extLst>
+        </p:spPr>
+        <p:txBody>
+          <a:bodyPr/>
+          <a:lstStyle>
+            <a:lvl1pPr>
+              <a:defRPr sz="1200">
+                <a:solidFill>
+                  <a:srgbClr val="000000"/>
+                </a:solidFill>
+                <a:latin typeface="Times New Roman"/>
+                <a:ea typeface="Times New Roman"/>
+                <a:cs typeface="Times New Roman"/>
+              </a:defRPr>
+            </a:lvl1pPr>
+          </a:lstStyle>
+          <a:p>
+            <a:pPr algn="r"/>
+            <a:fld id="{F7021451-1387-4CA6-816F-3879F97B5CBC}" type="slidenum">
+              <a:rPr b="0" lang="en-US"/>
+              <a:t>14</a:t>
             </a:fld>
             <a:endParaRPr lang="en-US"/>
           </a:p>
